--- a/1-Psychologische-Tests/1-Abbildungen/gdt-1-standardproblem-der-testtheorie.pptx
+++ b/1-Psychologische-Tests/1-Abbildungen/gdt-1-standardproblem-der-testtheorie.pptx
@@ -3484,7 +3484,7 @@
                             <a:rPr lang="de-DE" i="1">
                               <a:latin typeface="Cambria Math" panose="02040503050406030204" pitchFamily="18" charset="0"/>
                             </a:rPr>
-                            <m:t>𝜌</m:t>
+                            <m:t>r</m:t>
                           </m:r>
                         </m:e>
                         <m:sub>
@@ -3598,7 +3598,7 @@
                             <a:rPr lang="de-DE" i="1">
                               <a:latin typeface="Cambria Math" panose="02040503050406030204" pitchFamily="18" charset="0"/>
                             </a:rPr>
-                            <m:t>𝜌</m:t>
+                            <m:t>r</m:t>
                           </m:r>
                         </m:e>
                         <m:sub>
@@ -3712,7 +3712,7 @@
                             <a:rPr lang="de-DE" i="1">
                               <a:latin typeface="Cambria Math" panose="02040503050406030204" pitchFamily="18" charset="0"/>
                             </a:rPr>
-                            <m:t>𝜌</m:t>
+                            <m:t>r</m:t>
                           </m:r>
                         </m:e>
                         <m:sub>
@@ -3826,7 +3826,7 @@
                             <a:rPr lang="de-DE" i="1">
                               <a:latin typeface="Cambria Math" panose="02040503050406030204" pitchFamily="18" charset="0"/>
                             </a:rPr>
-                            <m:t>𝜌</m:t>
+                            <m:t>r</m:t>
                           </m:r>
                         </m:e>
                         <m:sub>
@@ -3940,7 +3940,7 @@
                             <a:rPr lang="de-DE" i="1">
                               <a:latin typeface="Cambria Math" panose="02040503050406030204" pitchFamily="18" charset="0"/>
                             </a:rPr>
-                            <m:t>𝜌</m:t>
+                            <m:t>r</m:t>
                           </m:r>
                         </m:e>
                         <m:sub>
@@ -4054,7 +4054,7 @@
                             <a:rPr lang="de-DE" i="1">
                               <a:latin typeface="Cambria Math" panose="02040503050406030204" pitchFamily="18" charset="0"/>
                             </a:rPr>
-                            <m:t>𝜌</m:t>
+                            <m:t>r</m:t>
                           </m:r>
                         </m:e>
                         <m:sub>
@@ -5106,7 +5106,7 @@
                 <a:ea typeface="CMU Bright" panose="02000603000000000000" pitchFamily="2" charset="0"/>
                 <a:cs typeface="CMU Bright" panose="02000603000000000000" pitchFamily="2" charset="0"/>
               </a:rPr>
-              <a:t>Kovarianzperspektive</a:t>
+              <a:t>Korrelationsperspektive</a:t>
             </a:r>
             <a:endParaRPr lang="de-DE" sz="2000" dirty="0">
               <a:latin typeface="CMU Bright" panose="02000603000000000000" pitchFamily="2" charset="0"/>
